--- a/public/fun/pack/pptx/talkpro/발표템플릿프리미엄_32_교육·강의_토프아이보리.pptx
+++ b/public/fun/pack/pptx/talkpro/발표템플릿프리미엄_32_교육·강의_토프아이보리.pptx
@@ -115,12 +115,12 @@
   <p:extLst>
     <p:ext uri="{521415D9-36F7-43E2-AB2F-B90AF26B5E84}">
       <p14:sectionLst xmlns:p14="http://schemas.microsoft.com/office/powerpoint/2010/main">
-        <p14:section name="시작" id="{7B7B3BD8-1FEA-40DD-B14C-8F4909AFB922}">
+        <p14:section name="시작" id="{66F1BAB1-AA1C-467D-9FEE-7AADB299F109}">
           <p14:sldIdLst>
             <p14:sldId id="256"/>
           </p14:sldIdLst>
         </p14:section>
-        <p14:section name="본문" id="{37938B00-CF2E-49C9-9B7D-17FD09FCFE87}">
+        <p14:section name="본문" id="{5BCE4B33-9DA0-4961-9A9A-95F31FF0DFBC}">
           <p14:sldIdLst>
             <p14:sldId id="257"/>
             <p14:sldId id="258"/>
@@ -131,7 +131,7 @@
             <p14:sldId id="263"/>
           </p14:sldIdLst>
         </p14:section>
-        <p14:section name="마무리" id="{DE5265EA-D651-458E-8B9A-DD559C39DB78}">
+        <p14:section name="마무리" id="{C8B074FF-6E8C-4811-AC98-418EF3D9DEDF}">
           <p14:sldIdLst>
             <p14:sldId id="264"/>
           </p14:sldIdLst>
@@ -1754,7 +1754,7 @@
             </a:lvl1pPr>
           </a:lstStyle>
           <a:p>
-            <a:fld id="{63257CDB-EFAE-4F5B-9F9A-F810B67F75DB}" type="slidenum">
+            <a:fld id="{A316ED0B-470B-4A6C-9BDC-4EA8CAA5D5C8}" type="slidenum">
               <a:rPr lang="en-US"/>
               <a:t>‹#›</a:t>
             </a:fld>
@@ -2335,7 +2335,7 @@
             </a:lvl1pPr>
           </a:lstStyle>
           <a:p>
-            <a:fld id="{6AC15B96-C632-425A-A0A8-A76C96C12214}" type="slidenum">
+            <a:fld id="{2B31F701-4565-4A1C-B56B-9C889DEFFB9F}" type="slidenum">
               <a:rPr lang="en-US"/>
               <a:t>‹#›</a:t>
             </a:fld>
@@ -3023,7 +3023,7 @@
             </a:lvl1pPr>
           </a:lstStyle>
           <a:p>
-            <a:fld id="{977E63D6-DCA1-427B-BB77-2B187D564379}" type="slidenum">
+            <a:fld id="{6330B9FE-14DD-40AC-B9F7-D798A25CD341}" type="slidenum">
               <a:rPr lang="en-US"/>
               <a:t>‹#›</a:t>
             </a:fld>
@@ -3940,7 +3940,7 @@
           <a:p>
             <a:r>
               <a:rPr lang="ko-KR"/>
-              <a:t>0000. 00. 00</a:t>
+              <a:t>날짜 입력</a:t>
             </a:r>
           </a:p>
         </p:txBody>
@@ -4025,7 +4025,7 @@
           <a:bodyPr/>
           <a:lstStyle/>
           <a:p>
-            <a:fld id="{15FB62E9-673B-4D83-A369-2C00789DE2E5}" type="slidenum">
+            <a:fld id="{A062438A-5459-4EC6-B518-17922736123D}" type="slidenum">
               <a:rPr lang="en-US"/>
               <a:t>‹#›</a:t>
             </a:fld>
@@ -5227,7 +5227,7 @@
           <a:bodyPr/>
           <a:lstStyle/>
           <a:p>
-            <a:fld id="{9E1D7AA5-95BE-4FE5-8FE3-7E7D0CCCD14A}" type="slidenum">
+            <a:fld id="{90057542-2F0B-406F-896E-4A8EFC08C625}" type="slidenum">
               <a:rPr lang="en-US"/>
               <a:t>‹#›</a:t>
             </a:fld>
@@ -5315,7 +5315,7 @@
           <a:bodyPr/>
           <a:lstStyle/>
           <a:p>
-            <a:fld id="{896C3DEC-6266-43E9-BAC2-92678EE7ADC2}" type="slidenum">
+            <a:fld id="{AD65A485-0E44-47E5-824E-B18C4087F49A}" type="slidenum">
               <a:rPr lang="en-US"/>
               <a:t>‹#›</a:t>
             </a:fld>
@@ -6288,7 +6288,7 @@
           <a:bodyPr/>
           <a:lstStyle/>
           <a:p>
-            <a:fld id="{B3B63AD7-DAF1-4F86-973B-436F5ED59BFD}" type="slidenum">
+            <a:fld id="{16E106A8-9A69-4C9F-8F4C-D02EDEDB4F34}" type="slidenum">
               <a:rPr lang="en-US"/>
               <a:t>‹#›</a:t>
             </a:fld>
@@ -6936,7 +6936,7 @@
           <a:bodyPr/>
           <a:lstStyle/>
           <a:p>
-            <a:fld id="{2C9C60E2-5075-4468-8A3B-49AADA591152}" type="slidenum">
+            <a:fld id="{CB4AE3AB-1EEF-4050-9DEC-F7EC15A79FFF}" type="slidenum">
               <a:rPr lang="en-US"/>
               <a:t>‹#›</a:t>
             </a:fld>
@@ -7119,7 +7119,7 @@
           <a:bodyPr/>
           <a:lstStyle/>
           <a:p>
-            <a:fld id="{2FCBE206-9E6B-49E7-BFF3-E94BB1DCD302}" type="slidenum">
+            <a:fld id="{3150DD8D-A3E2-450A-A50B-54752669E5E5}" type="slidenum">
               <a:rPr lang="en-US"/>
               <a:t>‹#›</a:t>
             </a:fld>
@@ -8183,7 +8183,7 @@
           <a:bodyPr/>
           <a:lstStyle/>
           <a:p>
-            <a:fld id="{0372DBAE-F3EE-4219-BBBE-1EA861CBFDC6}" type="slidenum">
+            <a:fld id="{80C078AF-CE89-4A6F-95DF-B48807314158}" type="slidenum">
               <a:rPr lang="en-US"/>
               <a:t>‹#›</a:t>
             </a:fld>
